--- a/Store Support/Projects/VET_Dashboard/reports/VET_Executive_Report_WK03.pptx
+++ b/Store Support/Projects/VET_Dashboard/reports/VET_Executive_Report_WK03.pptx
@@ -3110,7 +3110,7 @@
         <p:spPr>
           <a:xfrm>
             <a:off x="0" y="0"/>
-            <a:ext cx="8778240" cy="3954806"/>
+            <a:ext cx="8778240" cy="3770862"/>
           </a:xfrm>
           <a:prstGeom prst="rect">
             <a:avLst/>
